--- a/(A)MIPaC Introduction.pptx
+++ b/(A)MIPaC Introduction.pptx
@@ -7,7 +7,7 @@
     <p:sldMasterId id="2147483683" r:id="rId3"/>
   </p:sldMasterIdLst>
   <p:notesMasterIdLst>
-    <p:notesMasterId r:id="rId21"/>
+    <p:notesMasterId r:id="rId20"/>
   </p:notesMasterIdLst>
   <p:sldIdLst>
     <p:sldId id="256" r:id="rId4"/>
@@ -22,11 +22,10 @@
     <p:sldId id="266" r:id="rId13"/>
     <p:sldId id="269" r:id="rId14"/>
     <p:sldId id="270" r:id="rId15"/>
-    <p:sldId id="276" r:id="rId16"/>
-    <p:sldId id="274" r:id="rId17"/>
-    <p:sldId id="275" r:id="rId18"/>
-    <p:sldId id="271" r:id="rId19"/>
-    <p:sldId id="272" r:id="rId20"/>
+    <p:sldId id="274" r:id="rId16"/>
+    <p:sldId id="275" r:id="rId17"/>
+    <p:sldId id="271" r:id="rId18"/>
+    <p:sldId id="272" r:id="rId19"/>
   </p:sldIdLst>
   <p:sldSz cx="10680700" cy="7556500"/>
   <p:notesSz cx="6858000" cy="9144000"/>
@@ -1464,7 +1463,7 @@
   <p:cSld>
     <p:spTree>
       <p:nvGrpSpPr>
-        <p:cNvPr id="1" name="Shape 228"/>
+        <p:cNvPr id="1" name="Shape 211"/>
         <p:cNvGrpSpPr/>
         <p:nvPr/>
       </p:nvGrpSpPr>
@@ -1478,7 +1477,7 @@
       </p:grpSpPr>
       <p:sp>
         <p:nvSpPr>
-          <p:cNvPr id="229" name="Google Shape;229;g43a0576814_1_66:notes"/>
+          <p:cNvPr id="212" name="Google Shape;212;g43a0576814_1_93:notes"/>
           <p:cNvSpPr>
             <a:spLocks noGrp="1" noRot="1" noChangeAspect="1"/>
           </p:cNvSpPr>
@@ -1519,7 +1518,7 @@
       </p:sp>
       <p:sp>
         <p:nvSpPr>
-          <p:cNvPr id="230" name="Google Shape;230;g43a0576814_1_66:notes"/>
+          <p:cNvPr id="213" name="Google Shape;213;g43a0576814_1_93:notes"/>
           <p:cNvSpPr txBox="1">
             <a:spLocks noGrp="1"/>
           </p:cNvSpPr>
@@ -1558,7 +1557,7 @@
     </p:spTree>
     <p:extLst>
       <p:ext uri="{BB962C8B-B14F-4D97-AF65-F5344CB8AC3E}">
-        <p14:creationId xmlns:p14="http://schemas.microsoft.com/office/powerpoint/2010/main" val="971156018"/>
+        <p14:creationId xmlns:p14="http://schemas.microsoft.com/office/powerpoint/2010/main" val="445853899"/>
       </p:ext>
     </p:extLst>
   </p:cSld>
@@ -1667,7 +1666,7 @@
     </p:spTree>
     <p:extLst>
       <p:ext uri="{BB962C8B-B14F-4D97-AF65-F5344CB8AC3E}">
-        <p14:creationId xmlns:p14="http://schemas.microsoft.com/office/powerpoint/2010/main" val="445853899"/>
+        <p14:creationId xmlns:p14="http://schemas.microsoft.com/office/powerpoint/2010/main" val="1721064536"/>
       </p:ext>
     </p:extLst>
   </p:cSld>
@@ -1678,115 +1677,6 @@
 </file>
 
 <file path=ppt/notesSlides/notesSlide15.xml><?xml version="1.0" encoding="utf-8"?>
-<p:notes xmlns:a="http://schemas.openxmlformats.org/drawingml/2006/main" xmlns:r="http://schemas.openxmlformats.org/officeDocument/2006/relationships" xmlns:p="http://schemas.openxmlformats.org/presentationml/2006/main" showMasterSp="0" showMasterPhAnim="0">
-  <p:cSld>
-    <p:spTree>
-      <p:nvGrpSpPr>
-        <p:cNvPr id="1" name="Shape 211"/>
-        <p:cNvGrpSpPr/>
-        <p:nvPr/>
-      </p:nvGrpSpPr>
-      <p:grpSpPr>
-        <a:xfrm>
-          <a:off x="0" y="0"/>
-          <a:ext cx="0" cy="0"/>
-          <a:chOff x="0" y="0"/>
-          <a:chExt cx="0" cy="0"/>
-        </a:xfrm>
-      </p:grpSpPr>
-      <p:sp>
-        <p:nvSpPr>
-          <p:cNvPr id="212" name="Google Shape;212;g43a0576814_1_93:notes"/>
-          <p:cNvSpPr>
-            <a:spLocks noGrp="1" noRot="1" noChangeAspect="1"/>
-          </p:cNvSpPr>
-          <p:nvPr>
-            <p:ph type="sldImg" idx="2"/>
-          </p:nvPr>
-        </p:nvSpPr>
-        <p:spPr>
-          <a:xfrm>
-            <a:off x="1006475" y="685800"/>
-            <a:ext cx="4845050" cy="3429000"/>
-          </a:xfrm>
-          <a:custGeom>
-            <a:avLst/>
-            <a:gdLst/>
-            <a:ahLst/>
-            <a:cxnLst/>
-            <a:rect l="l" t="t" r="r" b="b"/>
-            <a:pathLst>
-              <a:path w="120000" h="120000" extrusionOk="0">
-                <a:moveTo>
-                  <a:pt x="0" y="0"/>
-                </a:moveTo>
-                <a:lnTo>
-                  <a:pt x="120000" y="0"/>
-                </a:lnTo>
-                <a:lnTo>
-                  <a:pt x="120000" y="120000"/>
-                </a:lnTo>
-                <a:lnTo>
-                  <a:pt x="0" y="120000"/>
-                </a:lnTo>
-                <a:close/>
-              </a:path>
-            </a:pathLst>
-          </a:custGeom>
-        </p:spPr>
-      </p:sp>
-      <p:sp>
-        <p:nvSpPr>
-          <p:cNvPr id="213" name="Google Shape;213;g43a0576814_1_93:notes"/>
-          <p:cNvSpPr txBox="1">
-            <a:spLocks noGrp="1"/>
-          </p:cNvSpPr>
-          <p:nvPr>
-            <p:ph type="body" idx="1"/>
-          </p:nvPr>
-        </p:nvSpPr>
-        <p:spPr>
-          <a:xfrm>
-            <a:off x="914400" y="4343400"/>
-            <a:ext cx="5029200" cy="4114800"/>
-          </a:xfrm>
-          <a:prstGeom prst="rect">
-            <a:avLst/>
-          </a:prstGeom>
-        </p:spPr>
-        <p:txBody>
-          <a:bodyPr spcFirstLastPara="1" wrap="square" lIns="91425" tIns="45700" rIns="91425" bIns="45700" anchor="t" anchorCtr="0">
-            <a:noAutofit/>
-          </a:bodyPr>
-          <a:lstStyle/>
-          <a:p>
-            <a:pPr marL="0" lvl="0" indent="0" algn="l" rtl="0">
-              <a:spcBef>
-                <a:spcPts val="0"/>
-              </a:spcBef>
-              <a:spcAft>
-                <a:spcPts val="0"/>
-              </a:spcAft>
-              <a:buNone/>
-            </a:pPr>
-            <a:endParaRPr/>
-          </a:p>
-        </p:txBody>
-      </p:sp>
-    </p:spTree>
-    <p:extLst>
-      <p:ext uri="{BB962C8B-B14F-4D97-AF65-F5344CB8AC3E}">
-        <p14:creationId xmlns:p14="http://schemas.microsoft.com/office/powerpoint/2010/main" val="1721064536"/>
-      </p:ext>
-    </p:extLst>
-  </p:cSld>
-  <p:clrMapOvr>
-    <a:masterClrMapping/>
-  </p:clrMapOvr>
-</p:notes>
-</file>
-
-<file path=ppt/notesSlides/notesSlide16.xml><?xml version="1.0" encoding="utf-8"?>
 <p:notes xmlns:a="http://schemas.openxmlformats.org/drawingml/2006/main" xmlns:r="http://schemas.openxmlformats.org/officeDocument/2006/relationships" xmlns:p="http://schemas.openxmlformats.org/presentationml/2006/main" showMasterSp="0" showMasterPhAnim="0">
   <p:cSld>
     <p:spTree>
@@ -1890,7 +1780,7 @@
 </p:notes>
 </file>
 
-<file path=ppt/notesSlides/notesSlide17.xml><?xml version="1.0" encoding="utf-8"?>
+<file path=ppt/notesSlides/notesSlide16.xml><?xml version="1.0" encoding="utf-8"?>
 <p:notes xmlns:a="http://schemas.openxmlformats.org/drawingml/2006/main" xmlns:r="http://schemas.openxmlformats.org/officeDocument/2006/relationships" xmlns:p="http://schemas.openxmlformats.org/presentationml/2006/main" showMasterSp="0" showMasterPhAnim="0">
   <p:cSld>
     <p:spTree>
@@ -33905,39 +33795,7 @@
             </a:br>
             <a:r>
               <a:rPr lang="en-GB" sz="3000" b="1" noProof="0" dirty="0"/>
-              <a:t>1</a:t>
-            </a:r>
-            <a:r>
-              <a:rPr lang="en-GB" sz="3000" noProof="0" dirty="0"/>
-              <a:t> </a:t>
-            </a:r>
-            <a:r>
-              <a:rPr lang="en-GB" sz="3000" b="1" noProof="0" dirty="0"/>
-              <a:t>K</a:t>
-            </a:r>
-            <a:r>
-              <a:rPr lang="en-GB" sz="3000" noProof="0" dirty="0"/>
-              <a:t>nowledge point (max. </a:t>
-            </a:r>
-            <a:r>
-              <a:rPr lang="en-GB" sz="3000" b="1" noProof="0" dirty="0">
-                <a:solidFill>
-                  <a:schemeClr val="dk1"/>
-                </a:solidFill>
-              </a:rPr>
-              <a:t>8</a:t>
-            </a:r>
-            <a:r>
-              <a:rPr lang="en-GB" sz="3000" noProof="0" dirty="0"/>
-              <a:t>/</a:t>
-            </a:r>
-            <a:r>
-              <a:rPr lang="en-GB" sz="3000" b="1" dirty="0"/>
-              <a:t>20</a:t>
-            </a:r>
-            <a:r>
-              <a:rPr lang="en-GB" sz="3000" noProof="0" dirty="0"/>
-              <a:t>)</a:t>
+              <a:t>1 Knowledge point</a:t>
             </a:r>
           </a:p>
           <a:p>
@@ -33966,60 +33824,12 @@
               <a:t>4</a:t>
             </a:r>
             <a:r>
-              <a:rPr lang="en-GB" sz="3000" noProof="0" dirty="0">
+              <a:rPr lang="en-GB" sz="3000" b="1" noProof="0" dirty="0">
                 <a:solidFill>
                   <a:schemeClr val="dk1"/>
                 </a:solidFill>
               </a:rPr>
-              <a:t> </a:t>
-            </a:r>
-            <a:r>
-              <a:rPr lang="en-GB" sz="3000" b="1" noProof="0" dirty="0">
-                <a:solidFill>
-                  <a:schemeClr val="dk1"/>
-                </a:solidFill>
-              </a:rPr>
-              <a:t>P</a:t>
-            </a:r>
-            <a:r>
-              <a:rPr lang="en-GB" sz="3000" noProof="0" dirty="0">
-                <a:solidFill>
-                  <a:schemeClr val="dk1"/>
-                </a:solidFill>
-              </a:rPr>
-              <a:t>ractice points (max. </a:t>
-            </a:r>
-            <a:r>
-              <a:rPr lang="en-GB" sz="3000" b="1" noProof="0" dirty="0">
-                <a:solidFill>
-                  <a:schemeClr val="dk1"/>
-                </a:solidFill>
-              </a:rPr>
-              <a:t>32</a:t>
-            </a:r>
-            <a:r>
-              <a:rPr lang="en-GB" sz="3000" noProof="0" dirty="0">
-                <a:solidFill>
-                  <a:schemeClr val="dk1"/>
-                </a:solidFill>
-              </a:rPr>
-              <a:t>/</a:t>
-            </a:r>
-            <a:r>
-              <a:rPr lang="en-GB" sz="3000" b="1" dirty="0">
-                <a:solidFill>
-                  <a:schemeClr val="dk1"/>
-                </a:solidFill>
-              </a:rPr>
-              <a:t>72</a:t>
-            </a:r>
-            <a:r>
-              <a:rPr lang="en-GB" sz="3000" noProof="0" dirty="0">
-                <a:solidFill>
-                  <a:schemeClr val="dk1"/>
-                </a:solidFill>
-              </a:rPr>
-              <a:t>)</a:t>
+              <a:t> Practice points</a:t>
             </a:r>
           </a:p>
           <a:p>
@@ -34060,47 +33870,7 @@
                   <a:schemeClr val="dk1"/>
                 </a:solidFill>
               </a:rPr>
-              <a:t>S</a:t>
-            </a:r>
-            <a:r>
-              <a:rPr lang="en-GB" sz="3000" noProof="0" dirty="0">
-                <a:solidFill>
-                  <a:schemeClr val="dk1"/>
-                </a:solidFill>
-              </a:rPr>
-              <a:t>kill points (max. </a:t>
-            </a:r>
-            <a:r>
-              <a:rPr lang="en-GB" sz="3000" b="1" noProof="0" dirty="0">
-                <a:solidFill>
-                  <a:schemeClr val="dk1"/>
-                </a:solidFill>
-              </a:rPr>
-              <a:t>18</a:t>
-            </a:r>
-            <a:r>
-              <a:rPr lang="en-GB" sz="3000" noProof="0" dirty="0">
-                <a:solidFill>
-                  <a:schemeClr val="dk1"/>
-                </a:solidFill>
-              </a:rPr>
-              <a:t>/</a:t>
-            </a:r>
-            <a:r>
-              <a:rPr lang="en-GB" sz="3000" b="1" noProof="0" dirty="0">
-                <a:solidFill>
-                  <a:schemeClr val="dk1"/>
-                </a:solidFill>
-              </a:rPr>
-              <a:t>36</a:t>
-            </a:r>
-            <a:r>
-              <a:rPr lang="en-GB" sz="3000" noProof="0" dirty="0">
-                <a:solidFill>
-                  <a:schemeClr val="dk1"/>
-                </a:solidFill>
-              </a:rPr>
-              <a:t>)</a:t>
+              <a:t>? Skill points</a:t>
             </a:r>
           </a:p>
           <a:p>
@@ -34141,63 +33911,7 @@
                   <a:schemeClr val="dk1"/>
                 </a:solidFill>
               </a:rPr>
-              <a:t>40</a:t>
-            </a:r>
-            <a:r>
-              <a:rPr lang="en-GB" sz="3000" noProof="0" dirty="0">
-                <a:solidFill>
-                  <a:schemeClr val="dk1"/>
-                </a:solidFill>
-              </a:rPr>
-              <a:t> </a:t>
-            </a:r>
-            <a:r>
-              <a:rPr lang="en-GB" sz="3000" b="1" noProof="0" dirty="0">
-                <a:solidFill>
-                  <a:schemeClr val="dk1"/>
-                </a:solidFill>
-              </a:rPr>
-              <a:t>T</a:t>
-            </a:r>
-            <a:r>
-              <a:rPr lang="en-GB" sz="3000" noProof="0" dirty="0">
-                <a:solidFill>
-                  <a:schemeClr val="dk1"/>
-                </a:solidFill>
-              </a:rPr>
-              <a:t>est points (max. </a:t>
-            </a:r>
-            <a:r>
-              <a:rPr lang="en-GB" sz="3000" b="1" noProof="0" dirty="0">
-                <a:solidFill>
-                  <a:schemeClr val="dk1"/>
-                </a:solidFill>
-              </a:rPr>
-              <a:t>40</a:t>
-            </a:r>
-            <a:r>
-              <a:rPr lang="en-GB" sz="3000" noProof="0" dirty="0">
-                <a:solidFill>
-                  <a:schemeClr val="dk1"/>
-                </a:solidFill>
-              </a:rPr>
-              <a:t>/</a:t>
-            </a:r>
-            <a:r>
-              <a:rPr lang="en-GB" sz="3000" b="1" noProof="0" dirty="0">
-                <a:solidFill>
-                  <a:schemeClr val="dk1"/>
-                </a:solidFill>
-              </a:rPr>
-              <a:t>80</a:t>
-            </a:r>
-            <a:r>
-              <a:rPr lang="en-GB" sz="3000" noProof="0" dirty="0">
-                <a:solidFill>
-                  <a:schemeClr val="dk1"/>
-                </a:solidFill>
-              </a:rPr>
-              <a:t>)</a:t>
+              <a:t>40 Test points</a:t>
             </a:r>
             <a:endParaRPr lang="en-GB" sz="3000" b="1" noProof="0" dirty="0">
               <a:solidFill>
@@ -34328,15 +34042,71 @@
                   <a:schemeClr val="dk1"/>
                 </a:solidFill>
               </a:rPr>
-              <a:t> collectable (</a:t>
+              <a:t> </a:t>
             </a:r>
             <a:r>
-              <a:rPr lang="en-GB" b="1" noProof="0" dirty="0">
+              <a:rPr lang="en-GB" dirty="0">
                 <a:solidFill>
                   <a:schemeClr val="dk1"/>
                 </a:solidFill>
               </a:rPr>
-              <a:t>K</a:t>
+              <a:t>collected (</a:t>
+            </a:r>
+            <a:r>
+              <a:rPr lang="en-GB" b="1" dirty="0">
+                <a:solidFill>
+                  <a:schemeClr val="dk1"/>
+                </a:solidFill>
+              </a:rPr>
+              <a:t>Knowledge</a:t>
+            </a:r>
+            <a:r>
+              <a:rPr lang="en-GB" dirty="0">
+                <a:solidFill>
+                  <a:schemeClr val="dk1"/>
+                </a:solidFill>
+              </a:rPr>
+              <a:t>, </a:t>
+            </a:r>
+            <a:r>
+              <a:rPr lang="en-GB" b="1" dirty="0">
+                <a:solidFill>
+                  <a:schemeClr val="dk1"/>
+                </a:solidFill>
+              </a:rPr>
+              <a:t>Practice</a:t>
+            </a:r>
+            <a:r>
+              <a:rPr lang="en-GB" dirty="0">
+                <a:solidFill>
+                  <a:schemeClr val="dk1"/>
+                </a:solidFill>
+              </a:rPr>
+              <a:t>, </a:t>
+            </a:r>
+            <a:r>
+              <a:rPr lang="en-GB" b="1" dirty="0">
+                <a:solidFill>
+                  <a:schemeClr val="dk1"/>
+                </a:solidFill>
+              </a:rPr>
+              <a:t>Test</a:t>
+            </a:r>
+            <a:r>
+              <a:rPr lang="en-GB" dirty="0">
+                <a:solidFill>
+                  <a:schemeClr val="dk1"/>
+                </a:solidFill>
+              </a:rPr>
+              <a:t>) points</a:t>
+            </a:r>
+            <a:r>
+              <a:rPr lang="en-GB" b="1" dirty="0">
+                <a:solidFill>
+                  <a:schemeClr val="dk1"/>
+                </a:solidFill>
+              </a:rPr>
+              <a:t> </a:t>
             </a:r>
             <a:r>
               <a:rPr lang="en-GB" noProof="0" dirty="0">
@@ -34344,15 +34114,35 @@
                   <a:schemeClr val="dk1"/>
                 </a:solidFill>
               </a:rPr>
-              <a:t>nowledge, </a:t>
+              <a:t>→ grade</a:t>
+            </a:r>
+            <a:endParaRPr lang="en-GB" dirty="0">
+              <a:solidFill>
+                <a:schemeClr val="dk1"/>
+              </a:solidFill>
+            </a:endParaRPr>
+          </a:p>
+          <a:p>
+            <a:pPr lvl="0">
+              <a:buClr>
+                <a:schemeClr val="dk1"/>
+              </a:buClr>
+            </a:pPr>
+            <a:r>
+              <a:rPr lang="en-GB" noProof="0" dirty="0">
+                <a:solidFill>
+                  <a:schemeClr val="dk1"/>
+                </a:solidFill>
+              </a:rPr>
+              <a:t>According to </a:t>
             </a:r>
             <a:r>
-              <a:rPr lang="en-GB" b="1" noProof="0" dirty="0">
+              <a:rPr lang="en-GB" dirty="0">
                 <a:solidFill>
                   <a:schemeClr val="dk1"/>
                 </a:solidFill>
               </a:rPr>
-              <a:t>P</a:t>
+              <a:t>t</a:t>
             </a:r>
             <a:r>
               <a:rPr lang="en-GB" noProof="0" dirty="0">
@@ -34360,123 +34150,7 @@
                   <a:schemeClr val="dk1"/>
                 </a:solidFill>
               </a:rPr>
-              <a:t>ractice, </a:t>
-            </a:r>
-            <a:r>
-              <a:rPr lang="en-GB" b="1" noProof="0" dirty="0">
-                <a:solidFill>
-                  <a:schemeClr val="dk1"/>
-                </a:solidFill>
-              </a:rPr>
-              <a:t>S</a:t>
-            </a:r>
-            <a:r>
-              <a:rPr lang="en-GB" noProof="0" dirty="0">
-                <a:solidFill>
-                  <a:schemeClr val="dk1"/>
-                </a:solidFill>
-              </a:rPr>
-              <a:t>kill, </a:t>
-            </a:r>
-            <a:r>
-              <a:rPr lang="en-GB" b="1" noProof="0" dirty="0">
-                <a:solidFill>
-                  <a:schemeClr val="dk1"/>
-                </a:solidFill>
-              </a:rPr>
-              <a:t>T</a:t>
-            </a:r>
-            <a:r>
-              <a:rPr lang="en-GB" noProof="0" dirty="0">
-                <a:solidFill>
-                  <a:schemeClr val="dk1"/>
-                </a:solidFill>
-              </a:rPr>
-              <a:t>est) points = </a:t>
-            </a:r>
-            <a:r>
-              <a:rPr lang="en-GB" b="1" noProof="0" dirty="0">
-                <a:solidFill>
-                  <a:schemeClr val="dk1"/>
-                </a:solidFill>
-              </a:rPr>
-              <a:t>98</a:t>
-            </a:r>
-            <a:r>
-              <a:rPr lang="en-GB" noProof="0" dirty="0">
-                <a:solidFill>
-                  <a:schemeClr val="dk1"/>
-                </a:solidFill>
-              </a:rPr>
-              <a:t>/</a:t>
-            </a:r>
-            <a:r>
-              <a:rPr lang="en-GB" b="1" noProof="0" dirty="0">
-                <a:solidFill>
-                  <a:schemeClr val="dk1"/>
-                </a:solidFill>
-              </a:rPr>
-              <a:t>208</a:t>
-            </a:r>
-          </a:p>
-          <a:p>
-            <a:pPr marL="457200" lvl="0" indent="-457200" algn="l" rtl="0">
-              <a:lnSpc>
-                <a:spcPct val="100000"/>
-              </a:lnSpc>
-              <a:spcBef>
-                <a:spcPts val="0"/>
-              </a:spcBef>
-              <a:spcAft>
-                <a:spcPts val="0"/>
-              </a:spcAft>
-              <a:buClr>
-                <a:schemeClr val="dk1"/>
-              </a:buClr>
-              <a:buSzPts val="3600"/>
-              <a:buChar char="»"/>
-            </a:pPr>
-            <a:r>
-              <a:rPr lang="en-GB" noProof="0" dirty="0" err="1">
-                <a:solidFill>
-                  <a:schemeClr val="dk1"/>
-                </a:solidFill>
-              </a:rPr>
-              <a:t>Σ</a:t>
-            </a:r>
-            <a:r>
-              <a:rPr lang="en-GB" noProof="0" dirty="0">
-                <a:solidFill>
-                  <a:schemeClr val="dk1"/>
-                </a:solidFill>
-              </a:rPr>
-              <a:t> collected points → attribute:</a:t>
-            </a:r>
-          </a:p>
-          <a:p>
-            <a:pPr marL="914400" lvl="1" indent="-457200" algn="l" rtl="0">
-              <a:lnSpc>
-                <a:spcPct val="100000"/>
-              </a:lnSpc>
-              <a:spcBef>
-                <a:spcPts val="0"/>
-              </a:spcBef>
-              <a:spcAft>
-                <a:spcPts val="0"/>
-              </a:spcAft>
-              <a:buClr>
-                <a:schemeClr val="dk1"/>
-              </a:buClr>
-              <a:buSzPts val="3600"/>
-              <a:buChar char="–"/>
-            </a:pPr>
-            <a:r>
-              <a:rPr lang="en-GB" noProof="0" dirty="0">
-                <a:solidFill>
-                  <a:schemeClr val="dk1"/>
-                </a:solidFill>
-              </a:rPr>
-              <a:t>According to the regulations of the </a:t>
+              <a:t>he regulations of the </a:t>
             </a:r>
             <a:r>
               <a:rPr lang="en-GB" b="1" noProof="0" dirty="0">
@@ -34512,21 +34186,10 @@
             </a:r>
           </a:p>
           <a:p>
-            <a:pPr marL="914400" lvl="1" indent="-457200" algn="l" rtl="0">
-              <a:lnSpc>
-                <a:spcPct val="100000"/>
-              </a:lnSpc>
-              <a:spcBef>
-                <a:spcPts val="0"/>
-              </a:spcBef>
-              <a:spcAft>
-                <a:spcPts val="0"/>
-              </a:spcAft>
-              <a:buClr>
-                <a:srgbClr val="00693C"/>
-              </a:buClr>
-              <a:buSzPts val="3600"/>
-              <a:buChar char="–"/>
+            <a:pPr lvl="0">
+              <a:buClr>
+                <a:schemeClr val="dk1"/>
+              </a:buClr>
             </a:pPr>
             <a:r>
               <a:rPr lang="en-GB" b="1" noProof="0" dirty="0">
@@ -34534,38 +34197,43 @@
                   <a:srgbClr val="00693C"/>
                 </a:solidFill>
               </a:rPr>
-              <a:t>Assuming 80/172 → 100%</a:t>
+              <a:t>Skill points count extra! %</a:t>
             </a:r>
-            <a:endParaRPr lang="en-GB" b="1" noProof="0" dirty="0">
+            <a:endParaRPr lang="en-GB" b="1" dirty="0">
               <a:solidFill>
                 <a:srgbClr val="A71930"/>
               </a:solidFill>
             </a:endParaRPr>
           </a:p>
           <a:p>
-            <a:pPr marL="914400" lvl="1" indent="-457200" algn="l" rtl="0">
-              <a:lnSpc>
-                <a:spcPct val="100000"/>
-              </a:lnSpc>
-              <a:spcBef>
-                <a:spcPts val="0"/>
-              </a:spcBef>
-              <a:spcAft>
-                <a:spcPts val="0"/>
-              </a:spcAft>
-              <a:buClr>
-                <a:srgbClr val="A71930"/>
-              </a:buClr>
-              <a:buSzPts val="3600"/>
-              <a:buChar char="–"/>
+            <a:pPr lvl="0">
+              <a:buClr>
+                <a:schemeClr val="dk1"/>
+              </a:buClr>
             </a:pPr>
             <a:r>
+              <a:rPr lang="el-GR" b="1" noProof="0" dirty="0">
+                <a:solidFill>
+                  <a:srgbClr val="A71930"/>
+                </a:solidFill>
+              </a:rPr>
+              <a:t>Σ</a:t>
+            </a:r>
+            <a:r>
+              <a:rPr lang="pl-PL" b="1" noProof="0" dirty="0">
+                <a:solidFill>
+                  <a:srgbClr val="A71930"/>
+                </a:solidFill>
+              </a:rPr>
+              <a:t> </a:t>
+            </a:r>
+            <a:r>
               <a:rPr lang="en-GB" b="1" noProof="0" dirty="0">
                 <a:solidFill>
                   <a:srgbClr val="A71930"/>
                 </a:solidFill>
               </a:rPr>
-              <a:t>Test minimum 16/32</a:t>
+              <a:t>test(s) minimum 40%</a:t>
             </a:r>
             <a:endParaRPr lang="en-GB" b="1" noProof="0" dirty="0">
               <a:solidFill>
@@ -34584,252 +34252,6 @@
 </file>
 
 <file path=ppt/slides/slide13.xml><?xml version="1.0" encoding="utf-8"?>
-<p:sld xmlns:a="http://schemas.openxmlformats.org/drawingml/2006/main" xmlns:r="http://schemas.openxmlformats.org/officeDocument/2006/relationships" xmlns:p="http://schemas.openxmlformats.org/presentationml/2006/main">
-  <p:cSld>
-    <p:spTree>
-      <p:nvGrpSpPr>
-        <p:cNvPr id="1" name="Shape 231"/>
-        <p:cNvGrpSpPr/>
-        <p:nvPr/>
-      </p:nvGrpSpPr>
-      <p:grpSpPr>
-        <a:xfrm>
-          <a:off x="0" y="0"/>
-          <a:ext cx="0" cy="0"/>
-          <a:chOff x="0" y="0"/>
-          <a:chExt cx="0" cy="0"/>
-        </a:xfrm>
-      </p:grpSpPr>
-      <p:sp>
-        <p:nvSpPr>
-          <p:cNvPr id="232" name="Google Shape;232;p49"/>
-          <p:cNvSpPr txBox="1">
-            <a:spLocks noGrp="1"/>
-          </p:cNvSpPr>
-          <p:nvPr>
-            <p:ph type="title"/>
-          </p:nvPr>
-        </p:nvSpPr>
-        <p:spPr>
-          <a:xfrm>
-            <a:off x="801687" y="671512"/>
-            <a:ext cx="9085200" cy="1260600"/>
-          </a:xfrm>
-          <a:prstGeom prst="rect">
-            <a:avLst/>
-          </a:prstGeom>
-        </p:spPr>
-        <p:txBody>
-          <a:bodyPr spcFirstLastPara="1" wrap="square" lIns="52125" tIns="52125" rIns="52125" bIns="52125" anchor="ctr" anchorCtr="0">
-            <a:noAutofit/>
-          </a:bodyPr>
-          <a:lstStyle/>
-          <a:p>
-            <a:pPr marL="0" lvl="0" indent="0" algn="ctr" rtl="0">
-              <a:spcBef>
-                <a:spcPts val="0"/>
-              </a:spcBef>
-              <a:spcAft>
-                <a:spcPts val="0"/>
-              </a:spcAft>
-              <a:buNone/>
-            </a:pPr>
-            <a:r>
-              <a:rPr lang="en-GB" noProof="0" dirty="0"/>
-              <a:t>Grades</a:t>
-            </a:r>
-          </a:p>
-        </p:txBody>
-      </p:sp>
-      <p:sp>
-        <p:nvSpPr>
-          <p:cNvPr id="233" name="Google Shape;233;p49"/>
-          <p:cNvSpPr txBox="1">
-            <a:spLocks noGrp="1"/>
-          </p:cNvSpPr>
-          <p:nvPr>
-            <p:ph type="body" idx="1"/>
-          </p:nvPr>
-        </p:nvSpPr>
-        <p:spPr>
-          <a:xfrm>
-            <a:off x="801687" y="2184400"/>
-            <a:ext cx="9085200" cy="4538700"/>
-          </a:xfrm>
-          <a:prstGeom prst="rect">
-            <a:avLst/>
-          </a:prstGeom>
-        </p:spPr>
-        <p:txBody>
-          <a:bodyPr spcFirstLastPara="1" wrap="square" lIns="52125" tIns="52125" rIns="52125" bIns="52125" anchor="t" anchorCtr="0">
-            <a:noAutofit/>
-          </a:bodyPr>
-          <a:lstStyle/>
-          <a:p>
-            <a:pPr indent="-419100">
-              <a:lnSpc>
-                <a:spcPct val="115000"/>
-              </a:lnSpc>
-              <a:buClr>
-                <a:srgbClr val="A71930"/>
-              </a:buClr>
-              <a:buSzPts val="3000"/>
-            </a:pPr>
-            <a:r>
-              <a:rPr lang="en-GB" sz="2800" b="1" noProof="0" dirty="0">
-                <a:solidFill>
-                  <a:srgbClr val="A71930"/>
-                </a:solidFill>
-              </a:rPr>
-              <a:t>2.0</a:t>
-            </a:r>
-          </a:p>
-          <a:p>
-            <a:pPr marL="457200" lvl="0" indent="-419100" algn="l" rtl="0">
-              <a:lnSpc>
-                <a:spcPct val="115000"/>
-              </a:lnSpc>
-              <a:spcBef>
-                <a:spcPts val="1000"/>
-              </a:spcBef>
-              <a:spcAft>
-                <a:spcPts val="0"/>
-              </a:spcAft>
-              <a:buClr>
-                <a:srgbClr val="00693C"/>
-              </a:buClr>
-              <a:buSzPts val="3000"/>
-              <a:buChar char="»"/>
-            </a:pPr>
-            <a:r>
-              <a:rPr lang="en-GB" sz="2800" b="1" noProof="0" dirty="0">
-                <a:solidFill>
-                  <a:srgbClr val="00693C"/>
-                </a:solidFill>
-              </a:rPr>
-              <a:t>3.0: 50% → 41%</a:t>
-            </a:r>
-          </a:p>
-          <a:p>
-            <a:pPr marL="457200" lvl="0" indent="-419100" algn="l" rtl="0">
-              <a:lnSpc>
-                <a:spcPct val="115000"/>
-              </a:lnSpc>
-              <a:spcBef>
-                <a:spcPts val="1000"/>
-              </a:spcBef>
-              <a:spcAft>
-                <a:spcPts val="0"/>
-              </a:spcAft>
-              <a:buClr>
-                <a:srgbClr val="00693C"/>
-              </a:buClr>
-              <a:buSzPts val="3000"/>
-              <a:buChar char="»"/>
-            </a:pPr>
-            <a:r>
-              <a:rPr lang="en-GB" sz="2800" b="1" noProof="0" dirty="0">
-                <a:solidFill>
-                  <a:srgbClr val="00693C"/>
-                </a:solidFill>
-              </a:rPr>
-              <a:t>3.5: 60% → 50%</a:t>
-            </a:r>
-          </a:p>
-          <a:p>
-            <a:pPr marL="457200" lvl="0" indent="-419100" algn="l" rtl="0">
-              <a:lnSpc>
-                <a:spcPct val="115000"/>
-              </a:lnSpc>
-              <a:spcBef>
-                <a:spcPts val="1000"/>
-              </a:spcBef>
-              <a:spcAft>
-                <a:spcPts val="0"/>
-              </a:spcAft>
-              <a:buClr>
-                <a:srgbClr val="00693C"/>
-              </a:buClr>
-              <a:buSzPts val="3000"/>
-              <a:buChar char="»"/>
-            </a:pPr>
-            <a:r>
-              <a:rPr lang="en-GB" sz="2800" b="1" noProof="0" dirty="0">
-                <a:solidFill>
-                  <a:srgbClr val="00693C"/>
-                </a:solidFill>
-              </a:rPr>
-              <a:t>4.0: 70% → 58% </a:t>
-            </a:r>
-          </a:p>
-          <a:p>
-            <a:pPr marL="457200" lvl="0" indent="-419100" algn="l" rtl="0">
-              <a:lnSpc>
-                <a:spcPct val="115000"/>
-              </a:lnSpc>
-              <a:spcBef>
-                <a:spcPts val="1000"/>
-              </a:spcBef>
-              <a:spcAft>
-                <a:spcPts val="0"/>
-              </a:spcAft>
-              <a:buClr>
-                <a:srgbClr val="00693C"/>
-              </a:buClr>
-              <a:buSzPts val="3000"/>
-              <a:buChar char="»"/>
-            </a:pPr>
-            <a:r>
-              <a:rPr lang="en-GB" sz="2800" b="1" noProof="0" dirty="0">
-                <a:solidFill>
-                  <a:srgbClr val="00693C"/>
-                </a:solidFill>
-              </a:rPr>
-              <a:t>4.5: 80% → 66%</a:t>
-            </a:r>
-          </a:p>
-          <a:p>
-            <a:pPr marL="457200" lvl="0" indent="-419100" algn="l" rtl="0">
-              <a:lnSpc>
-                <a:spcPct val="115000"/>
-              </a:lnSpc>
-              <a:spcBef>
-                <a:spcPts val="1000"/>
-              </a:spcBef>
-              <a:spcAft>
-                <a:spcPts val="1000"/>
-              </a:spcAft>
-              <a:buClr>
-                <a:srgbClr val="00693C"/>
-              </a:buClr>
-              <a:buSzPts val="3000"/>
-              <a:buChar char="»"/>
-            </a:pPr>
-            <a:r>
-              <a:rPr lang="en-GB" sz="2800" b="1" noProof="0" dirty="0">
-                <a:solidFill>
-                  <a:srgbClr val="00693C"/>
-                </a:solidFill>
-              </a:rPr>
-              <a:t>5.0: 90% → 74%</a:t>
-            </a:r>
-          </a:p>
-        </p:txBody>
-      </p:sp>
-    </p:spTree>
-    <p:extLst>
-      <p:ext uri="{BB962C8B-B14F-4D97-AF65-F5344CB8AC3E}">
-        <p14:creationId xmlns:p14="http://schemas.microsoft.com/office/powerpoint/2010/main" val="464280421"/>
-      </p:ext>
-    </p:extLst>
-  </p:cSld>
-  <p:clrMapOvr>
-    <a:masterClrMapping/>
-  </p:clrMapOvr>
-</p:sld>
-</file>
-
-<file path=ppt/slides/slide14.xml><?xml version="1.0" encoding="utf-8"?>
 <p:sld xmlns:a="http://schemas.openxmlformats.org/drawingml/2006/main" xmlns:r="http://schemas.openxmlformats.org/officeDocument/2006/relationships" xmlns:p="http://schemas.openxmlformats.org/presentationml/2006/main">
   <p:cSld>
     <p:spTree>
@@ -34938,7 +34360,7 @@
 </p:sld>
 </file>
 
-<file path=ppt/slides/slide15.xml><?xml version="1.0" encoding="utf-8"?>
+<file path=ppt/slides/slide14.xml><?xml version="1.0" encoding="utf-8"?>
 <p:sld xmlns:a="http://schemas.openxmlformats.org/drawingml/2006/main" xmlns:r="http://schemas.openxmlformats.org/officeDocument/2006/relationships" xmlns:p="http://schemas.openxmlformats.org/presentationml/2006/main">
   <p:cSld>
     <p:spTree>
@@ -35051,7 +34473,7 @@
 </p:sld>
 </file>
 
-<file path=ppt/slides/slide16.xml><?xml version="1.0" encoding="utf-8"?>
+<file path=ppt/slides/slide15.xml><?xml version="1.0" encoding="utf-8"?>
 <p:sld xmlns:a="http://schemas.openxmlformats.org/drawingml/2006/main" xmlns:r="http://schemas.openxmlformats.org/officeDocument/2006/relationships" xmlns:p="http://schemas.openxmlformats.org/presentationml/2006/main">
   <p:cSld>
     <p:spTree>
@@ -35155,7 +34577,7 @@
 </p:sld>
 </file>
 
-<file path=ppt/slides/slide17.xml><?xml version="1.0" encoding="utf-8"?>
+<file path=ppt/slides/slide16.xml><?xml version="1.0" encoding="utf-8"?>
 <p:sld xmlns:a="http://schemas.openxmlformats.org/drawingml/2006/main" xmlns:r="http://schemas.openxmlformats.org/officeDocument/2006/relationships" xmlns:p="http://schemas.openxmlformats.org/presentationml/2006/main">
   <p:cSld>
     <p:spTree>
@@ -35287,7 +34709,7 @@
             </a:pPr>
             <a:fld id="{00000000-1234-1234-1234-123412341234}" type="slidenum">
               <a:rPr lang="en-GB" noProof="0" smtClean="0"/>
-              <a:t>17</a:t>
+              <a:t>16</a:t>
             </a:fld>
             <a:endParaRPr lang="en-GB" noProof="0" dirty="0"/>
           </a:p>
@@ -36136,63 +35558,13 @@
             </a:pPr>
             <a:r>
               <a:rPr lang="en-GB" sz="3000" noProof="0" dirty="0"/>
-              <a:t>Computer classes, each consisting of introductory talk, exercise, report submission (+ suppl. ex.):</a:t>
+              <a:t>Computer classes, each consisting of introductory talk, exercise, report submission (+ suppl. ex.)</a:t>
             </a:r>
           </a:p>
           <a:p>
-            <a:pPr marL="914400" lvl="1" indent="-419100" algn="l" rtl="0">
-              <a:spcBef>
-                <a:spcPts val="0"/>
-              </a:spcBef>
-              <a:spcAft>
-                <a:spcPts val="0"/>
-              </a:spcAft>
-              <a:buSzPts val="3000"/>
-              <a:buChar char="–"/>
-            </a:pPr>
-            <a:r>
-              <a:rPr lang="en-GB" sz="3000" noProof="0" dirty="0"/>
-              <a:t>MIPaC: </a:t>
-            </a:r>
-            <a:r>
-              <a:rPr lang="en-GB" sz="3000" b="1" noProof="0" dirty="0">
-                <a:solidFill>
-                  <a:schemeClr val="dk1"/>
-                </a:solidFill>
-              </a:rPr>
-              <a:t>1⋅8×⇒8×</a:t>
-            </a:r>
-            <a:endParaRPr lang="en-GB" sz="3000" noProof="0" dirty="0"/>
-          </a:p>
-          <a:p>
-            <a:pPr marL="914400" lvl="1" indent="-419100" algn="l" rtl="0">
-              <a:spcBef>
-                <a:spcPts val="0"/>
-              </a:spcBef>
-              <a:spcAft>
-                <a:spcPts val="0"/>
-              </a:spcAft>
-              <a:buSzPts val="3000"/>
-              <a:buChar char="–"/>
-            </a:pPr>
-            <a:r>
-              <a:rPr lang="en-GB" sz="3000" noProof="0" dirty="0"/>
-              <a:t>AMIPaC: </a:t>
-            </a:r>
-            <a:r>
-              <a:rPr lang="en-GB" sz="3000" b="1" noProof="0" dirty="0">
-                <a:solidFill>
-                  <a:schemeClr val="dk1"/>
-                </a:solidFill>
-              </a:rPr>
-              <a:t>2⋅9×⇒18×</a:t>
-            </a:r>
-            <a:endParaRPr lang="en-GB" sz="3000" noProof="0" dirty="0"/>
-          </a:p>
-          <a:p>
             <a:pPr marL="457200" lvl="0" indent="-419100" algn="l" rtl="0">
               <a:spcBef>
-                <a:spcPts val="0"/>
+                <a:spcPts val="800"/>
               </a:spcBef>
               <a:spcAft>
                 <a:spcPts val="0"/>
